--- a/decks/hist-plantagenets/hist-plantagenets_ch2_four-kings.pptx
+++ b/decks/hist-plantagenets/hist-plantagenets_ch2_four-kings.pptx
@@ -125,30 +125,30 @@
   <p:extLst>
     <p:ext uri="{521415D9-36F7-43E2-AB2F-B90AF26B5E84}">
       <p14:sectionLst xmlns:p14="http://schemas.microsoft.com/office/powerpoint/2010/main">
-        <p14:section name="Opening" id="{a6ea9281-57ee-8625-80ee-e9bb1d005d70}">
+        <p14:section name="Opening" id="{1a090c5d-d8f8-f5e1-644d-50ed4c069446}">
           <p14:sldIdLst>
             <p14:sldId id="256"/>
           </p14:sldIdLst>
         </p14:section>
-        <p14:section name="Gate" id="{ca8ba375-f32c-c5ee-6c21-a9c0f14da686}">
+        <p14:section name="Gate" id="{98a1311d-b26f-3fcd-b68e-bd7436789f85}">
           <p14:sldIdLst>
             <p14:sldId id="257"/>
             <p14:sldId id="258"/>
           </p14:sldIdLst>
         </p14:section>
-        <p14:section name="Pre-teach" id="{af24523c-4578-d439-5bb5-844475737a24}">
+        <p14:section name="Pre-teach" id="{385d8a13-e183-6398-1d9d-f53723af4e7d}">
           <p14:sldIdLst>
             <p14:sldId id="259"/>
             <p14:sldId id="260"/>
           </p14:sldIdLst>
         </p14:section>
-        <p14:section name="Read-along" id="{9a33c24d-8942-88a6-6362-cdfcaef07c1d}">
+        <p14:section name="Read-along" id="{9536dc13-9828-d57b-c596-66439e006464}">
           <p14:sldIdLst>
             <p14:sldId id="261"/>
             <p14:sldId id="262"/>
           </p14:sldIdLst>
         </p14:section>
-        <p14:section name="Teach" id="{3821e5c4-d3f7-92fe-d4ca-f1e4b9c27cf0}">
+        <p14:section name="Teach" id="{29cf132b-6b30-aab8-e0f7-f9cf14be991f}">
           <p14:sldIdLst>
             <p14:sldId id="263"/>
             <p14:sldId id="264"/>
@@ -157,19 +157,19 @@
             <p14:sldId id="267"/>
           </p14:sldIdLst>
         </p14:section>
-        <p14:section name="Routes" id="{f9e401ed-69f0-cb71-f8d0-df5e3f5f39a6}">
+        <p14:section name="Routes" id="{c9265c91-c0df-1cc8-7928-01b743a91fcf}">
           <p14:sldIdLst>
             <p14:sldId id="268"/>
             <p14:sldId id="269"/>
             <p14:sldId id="270"/>
           </p14:sldIdLst>
         </p14:section>
-        <p14:section name="Close" id="{23d703c8-d8f9-33eb-3ea5-57c8ad394247}">
+        <p14:section name="Close" id="{bde99adf-9cce-5aa6-2f73-aa61b99f786b}">
           <p14:sldIdLst>
             <p14:sldId id="271"/>
           </p14:sldIdLst>
         </p14:section>
-        <p14:section name="Answers" id="{85fad068-cb3b-1f22-4730-59e6776a56d1}">
+        <p14:section name="Answers" id="{ada12db1-b279-c710-adaf-00102f0f6aed}">
           <p14:sldIdLst>
             <p14:sldId id="272"/>
             <p14:sldId id="273"/>
